--- a/SuperChromeDino/notebook/slide.pptx
+++ b/SuperChromeDino/notebook/slide.pptx
@@ -5,13 +5,14 @@
     <p:sldMasterId id="2147483648" r:id="rId1"/>
   </p:sldMasterIdLst>
   <p:notesMasterIdLst>
-    <p:notesMasterId r:id="rId6"/>
+    <p:notesMasterId r:id="rId7"/>
   </p:notesMasterIdLst>
   <p:sldIdLst>
     <p:sldId id="258" r:id="rId2"/>
     <p:sldId id="256" r:id="rId3"/>
     <p:sldId id="259" r:id="rId4"/>
     <p:sldId id="260" r:id="rId5"/>
+    <p:sldId id="261" r:id="rId6"/>
   </p:sldIdLst>
   <p:sldSz cx="12192000" cy="6858000"/>
   <p:notesSz cx="6858000" cy="9144000"/>
@@ -200,7 +201,7 @@
           <a:p>
             <a:fld id="{00C41961-FE8A-4BE1-9DDF-15BBD058F0FA}" type="datetimeFigureOut">
               <a:rPr kumimoji="1" lang="ja-JP" altLang="en-US" smtClean="0"/>
-              <a:t>2026/5/28</a:t>
+              <a:t>2026/5/30</a:t>
             </a:fld>
             <a:endParaRPr kumimoji="1" lang="ja-JP" altLang="en-US"/>
           </a:p>
@@ -730,7 +731,7 @@
           <a:p>
             <a:fld id="{8BB06768-D803-4A2A-94D0-49F2EC2B67A1}" type="datetimeFigureOut">
               <a:rPr kumimoji="1" lang="ja-JP" altLang="en-US" smtClean="0"/>
-              <a:t>2026/5/28</a:t>
+              <a:t>2026/5/30</a:t>
             </a:fld>
             <a:endParaRPr kumimoji="1" lang="ja-JP" altLang="en-US"/>
           </a:p>
@@ -960,7 +961,7 @@
           <a:p>
             <a:fld id="{8BB06768-D803-4A2A-94D0-49F2EC2B67A1}" type="datetimeFigureOut">
               <a:rPr kumimoji="1" lang="ja-JP" altLang="en-US" smtClean="0"/>
-              <a:t>2026/5/28</a:t>
+              <a:t>2026/5/30</a:t>
             </a:fld>
             <a:endParaRPr kumimoji="1" lang="ja-JP" altLang="en-US"/>
           </a:p>
@@ -1200,7 +1201,7 @@
           <a:p>
             <a:fld id="{8BB06768-D803-4A2A-94D0-49F2EC2B67A1}" type="datetimeFigureOut">
               <a:rPr kumimoji="1" lang="ja-JP" altLang="en-US" smtClean="0"/>
-              <a:t>2026/5/28</a:t>
+              <a:t>2026/5/30</a:t>
             </a:fld>
             <a:endParaRPr kumimoji="1" lang="ja-JP" altLang="en-US"/>
           </a:p>
@@ -1430,7 +1431,7 @@
           <a:p>
             <a:fld id="{8BB06768-D803-4A2A-94D0-49F2EC2B67A1}" type="datetimeFigureOut">
               <a:rPr kumimoji="1" lang="ja-JP" altLang="en-US" smtClean="0"/>
-              <a:t>2026/5/28</a:t>
+              <a:t>2026/5/30</a:t>
             </a:fld>
             <a:endParaRPr kumimoji="1" lang="ja-JP" altLang="en-US"/>
           </a:p>
@@ -1705,7 +1706,7 @@
           <a:p>
             <a:fld id="{8BB06768-D803-4A2A-94D0-49F2EC2B67A1}" type="datetimeFigureOut">
               <a:rPr kumimoji="1" lang="ja-JP" altLang="en-US" smtClean="0"/>
-              <a:t>2026/5/28</a:t>
+              <a:t>2026/5/30</a:t>
             </a:fld>
             <a:endParaRPr kumimoji="1" lang="ja-JP" altLang="en-US"/>
           </a:p>
@@ -2034,7 +2035,7 @@
           <a:p>
             <a:fld id="{8BB06768-D803-4A2A-94D0-49F2EC2B67A1}" type="datetimeFigureOut">
               <a:rPr kumimoji="1" lang="ja-JP" altLang="en-US" smtClean="0"/>
-              <a:t>2026/5/28</a:t>
+              <a:t>2026/5/30</a:t>
             </a:fld>
             <a:endParaRPr kumimoji="1" lang="ja-JP" altLang="en-US"/>
           </a:p>
@@ -2510,7 +2511,7 @@
           <a:p>
             <a:fld id="{8BB06768-D803-4A2A-94D0-49F2EC2B67A1}" type="datetimeFigureOut">
               <a:rPr kumimoji="1" lang="ja-JP" altLang="en-US" smtClean="0"/>
-              <a:t>2026/5/28</a:t>
+              <a:t>2026/5/30</a:t>
             </a:fld>
             <a:endParaRPr kumimoji="1" lang="ja-JP" altLang="en-US"/>
           </a:p>
@@ -2651,7 +2652,7 @@
           <a:p>
             <a:fld id="{8BB06768-D803-4A2A-94D0-49F2EC2B67A1}" type="datetimeFigureOut">
               <a:rPr kumimoji="1" lang="ja-JP" altLang="en-US" smtClean="0"/>
-              <a:t>2026/5/28</a:t>
+              <a:t>2026/5/30</a:t>
             </a:fld>
             <a:endParaRPr kumimoji="1" lang="ja-JP" altLang="en-US"/>
           </a:p>
@@ -2764,7 +2765,7 @@
           <a:p>
             <a:fld id="{8BB06768-D803-4A2A-94D0-49F2EC2B67A1}" type="datetimeFigureOut">
               <a:rPr kumimoji="1" lang="ja-JP" altLang="en-US" smtClean="0"/>
-              <a:t>2026/5/28</a:t>
+              <a:t>2026/5/30</a:t>
             </a:fld>
             <a:endParaRPr kumimoji="1" lang="ja-JP" altLang="en-US"/>
           </a:p>
@@ -3107,7 +3108,7 @@
           <a:p>
             <a:fld id="{8BB06768-D803-4A2A-94D0-49F2EC2B67A1}" type="datetimeFigureOut">
               <a:rPr kumimoji="1" lang="ja-JP" altLang="en-US" smtClean="0"/>
-              <a:t>2026/5/28</a:t>
+              <a:t>2026/5/30</a:t>
             </a:fld>
             <a:endParaRPr kumimoji="1" lang="ja-JP" altLang="en-US"/>
           </a:p>
@@ -3395,7 +3396,7 @@
           <a:p>
             <a:fld id="{8BB06768-D803-4A2A-94D0-49F2EC2B67A1}" type="datetimeFigureOut">
               <a:rPr kumimoji="1" lang="ja-JP" altLang="en-US" smtClean="0"/>
-              <a:t>2026/5/28</a:t>
+              <a:t>2026/5/30</a:t>
             </a:fld>
             <a:endParaRPr kumimoji="1" lang="ja-JP" altLang="en-US"/>
           </a:p>
@@ -3668,7 +3669,7 @@
           <a:p>
             <a:fld id="{8BB06768-D803-4A2A-94D0-49F2EC2B67A1}" type="datetimeFigureOut">
               <a:rPr kumimoji="1" lang="ja-JP" altLang="en-US" smtClean="0"/>
-              <a:t>2026/5/28</a:t>
+              <a:t>2026/5/30</a:t>
             </a:fld>
             <a:endParaRPr kumimoji="1" lang="ja-JP" altLang="en-US"/>
           </a:p>
@@ -4130,7 +4131,7 @@
         <p:spPr>
           <a:xfrm>
             <a:off x="5276675" y="4530055"/>
-            <a:ext cx="1895912" cy="1200329"/>
+            <a:ext cx="1895912" cy="1569660"/>
           </a:xfrm>
           <a:prstGeom prst="rect">
             <a:avLst/>
@@ -4165,6 +4166,16 @@
                 </a:solidFill>
               </a:rPr>
               <a:t>New Game</a:t>
+            </a:r>
+          </a:p>
+          <a:p>
+            <a:r>
+              <a:rPr kumimoji="1" lang="en-US" altLang="ja-JP" sz="2400">
+                <a:solidFill>
+                  <a:schemeClr val="bg1"/>
+                </a:solidFill>
+              </a:rPr>
+              <a:t>Settings</a:t>
             </a:r>
           </a:p>
           <a:p>
@@ -6457,6 +6468,1212 @@
     <p:extLst>
       <p:ext uri="{BB962C8B-B14F-4D97-AF65-F5344CB8AC3E}">
         <p14:creationId xmlns:p14="http://schemas.microsoft.com/office/powerpoint/2010/main" val="1521858455"/>
+      </p:ext>
+    </p:extLst>
+  </p:cSld>
+  <p:clrMapOvr>
+    <a:masterClrMapping/>
+  </p:clrMapOvr>
+</p:sld>
+</file>
+
+<file path=ppt/slides/slide5.xml><?xml version="1.0" encoding="utf-8"?>
+<p:sld xmlns:a="http://schemas.openxmlformats.org/drawingml/2006/main" xmlns:r="http://schemas.openxmlformats.org/officeDocument/2006/relationships" xmlns:p="http://schemas.openxmlformats.org/presentationml/2006/main">
+  <p:cSld>
+    <p:bg>
+      <p:bgPr>
+        <a:solidFill>
+          <a:schemeClr val="tx1"/>
+        </a:solidFill>
+        <a:effectLst/>
+      </p:bgPr>
+    </p:bg>
+    <p:spTree>
+      <p:nvGrpSpPr>
+        <p:cNvPr id="1" name=""/>
+        <p:cNvGrpSpPr/>
+        <p:nvPr/>
+      </p:nvGrpSpPr>
+      <p:grpSpPr>
+        <a:xfrm>
+          <a:off x="0" y="0"/>
+          <a:ext cx="0" cy="0"/>
+          <a:chOff x="0" y="0"/>
+          <a:chExt cx="0" cy="0"/>
+        </a:xfrm>
+      </p:grpSpPr>
+      <p:sp>
+        <p:nvSpPr>
+          <p:cNvPr id="4" name="テキスト ボックス 3">
+            <a:extLst>
+              <a:ext uri="{FF2B5EF4-FFF2-40B4-BE49-F238E27FC236}">
+                <a16:creationId xmlns:a16="http://schemas.microsoft.com/office/drawing/2014/main" id="{B5D57866-6266-0655-5F6F-42A6B16DFF66}"/>
+              </a:ext>
+            </a:extLst>
+          </p:cNvPr>
+          <p:cNvSpPr txBox="1"/>
+          <p:nvPr/>
+        </p:nvSpPr>
+        <p:spPr>
+          <a:xfrm>
+            <a:off x="402672" y="679508"/>
+            <a:ext cx="5117285" cy="523220"/>
+          </a:xfrm>
+          <a:prstGeom prst="rect">
+            <a:avLst/>
+          </a:prstGeom>
+          <a:noFill/>
+        </p:spPr>
+        <p:txBody>
+          <a:bodyPr wrap="square" rtlCol="0">
+            <a:spAutoFit/>
+          </a:bodyPr>
+          <a:lstStyle/>
+          <a:p>
+            <a:r>
+              <a:rPr lang="en-US" altLang="ja-JP" sz="2800">
+                <a:solidFill>
+                  <a:schemeClr val="bg1"/>
+                </a:solidFill>
+              </a:rPr>
+              <a:t>Settings</a:t>
+            </a:r>
+            <a:endParaRPr kumimoji="1" lang="ja-JP" altLang="en-US" sz="2800">
+              <a:solidFill>
+                <a:schemeClr val="bg1"/>
+              </a:solidFill>
+            </a:endParaRPr>
+          </a:p>
+        </p:txBody>
+      </p:sp>
+      <p:cxnSp>
+        <p:nvCxnSpPr>
+          <p:cNvPr id="6" name="直線コネクタ 5">
+            <a:extLst>
+              <a:ext uri="{FF2B5EF4-FFF2-40B4-BE49-F238E27FC236}">
+                <a16:creationId xmlns:a16="http://schemas.microsoft.com/office/drawing/2014/main" id="{238C89AF-7929-D80B-75C8-9F0B471C3324}"/>
+              </a:ext>
+            </a:extLst>
+          </p:cNvPr>
+          <p:cNvCxnSpPr>
+            <a:cxnSpLocks/>
+          </p:cNvCxnSpPr>
+          <p:nvPr/>
+        </p:nvCxnSpPr>
+        <p:spPr>
+          <a:xfrm>
+            <a:off x="2843868" y="1803633"/>
+            <a:ext cx="0" cy="2944536"/>
+          </a:xfrm>
+          <a:prstGeom prst="line">
+            <a:avLst/>
+          </a:prstGeom>
+          <a:ln>
+            <a:solidFill>
+              <a:schemeClr val="bg1"/>
+            </a:solidFill>
+          </a:ln>
+        </p:spPr>
+        <p:style>
+          <a:lnRef idx="2">
+            <a:schemeClr val="accent1"/>
+          </a:lnRef>
+          <a:fillRef idx="0">
+            <a:schemeClr val="accent1"/>
+          </a:fillRef>
+          <a:effectRef idx="1">
+            <a:schemeClr val="accent1"/>
+          </a:effectRef>
+          <a:fontRef idx="minor">
+            <a:schemeClr val="tx1"/>
+          </a:fontRef>
+        </p:style>
+      </p:cxnSp>
+      <p:sp>
+        <p:nvSpPr>
+          <p:cNvPr id="7" name="テキスト ボックス 6">
+            <a:extLst>
+              <a:ext uri="{FF2B5EF4-FFF2-40B4-BE49-F238E27FC236}">
+                <a16:creationId xmlns:a16="http://schemas.microsoft.com/office/drawing/2014/main" id="{C0D0DA17-9212-2EE2-AA53-4959B6ADBAFA}"/>
+              </a:ext>
+            </a:extLst>
+          </p:cNvPr>
+          <p:cNvSpPr txBox="1"/>
+          <p:nvPr/>
+        </p:nvSpPr>
+        <p:spPr>
+          <a:xfrm>
+            <a:off x="973123" y="1929360"/>
+            <a:ext cx="1518408" cy="369332"/>
+          </a:xfrm>
+          <a:prstGeom prst="rect">
+            <a:avLst/>
+          </a:prstGeom>
+          <a:noFill/>
+        </p:spPr>
+        <p:txBody>
+          <a:bodyPr wrap="square" rtlCol="0">
+            <a:spAutoFit/>
+          </a:bodyPr>
+          <a:lstStyle/>
+          <a:p>
+            <a:pPr algn="r"/>
+            <a:r>
+              <a:rPr lang="en-US" altLang="ja-JP" b="1">
+                <a:solidFill>
+                  <a:schemeClr val="bg1"/>
+                </a:solidFill>
+              </a:rPr>
+              <a:t>FPS</a:t>
+            </a:r>
+            <a:endParaRPr kumimoji="1" lang="ja-JP" altLang="en-US" b="1">
+              <a:solidFill>
+                <a:schemeClr val="bg1"/>
+              </a:solidFill>
+            </a:endParaRPr>
+          </a:p>
+        </p:txBody>
+      </p:sp>
+      <p:sp>
+        <p:nvSpPr>
+          <p:cNvPr id="8" name="テキスト ボックス 7">
+            <a:extLst>
+              <a:ext uri="{FF2B5EF4-FFF2-40B4-BE49-F238E27FC236}">
+                <a16:creationId xmlns:a16="http://schemas.microsoft.com/office/drawing/2014/main" id="{A3734F6A-9F69-55EB-468E-62A96FD55A54}"/>
+              </a:ext>
+            </a:extLst>
+          </p:cNvPr>
+          <p:cNvSpPr txBox="1"/>
+          <p:nvPr/>
+        </p:nvSpPr>
+        <p:spPr>
+          <a:xfrm>
+            <a:off x="209725" y="3404083"/>
+            <a:ext cx="2281806" cy="369332"/>
+          </a:xfrm>
+          <a:prstGeom prst="rect">
+            <a:avLst/>
+          </a:prstGeom>
+          <a:noFill/>
+        </p:spPr>
+        <p:txBody>
+          <a:bodyPr wrap="square" rtlCol="0">
+            <a:spAutoFit/>
+          </a:bodyPr>
+          <a:lstStyle/>
+          <a:p>
+            <a:pPr algn="r"/>
+            <a:r>
+              <a:rPr lang="ja-JP" altLang="ja-JP">
+                <a:solidFill>
+                  <a:schemeClr val="bg1">
+                    <a:lumMod val="65000"/>
+                  </a:schemeClr>
+                </a:solidFill>
+              </a:rPr>
+              <a:t>Cursor in Window</a:t>
+            </a:r>
+            <a:endParaRPr kumimoji="1" lang="ja-JP" altLang="en-US">
+              <a:solidFill>
+                <a:schemeClr val="bg1">
+                  <a:lumMod val="65000"/>
+                </a:schemeClr>
+              </a:solidFill>
+            </a:endParaRPr>
+          </a:p>
+        </p:txBody>
+      </p:sp>
+      <p:sp>
+        <p:nvSpPr>
+          <p:cNvPr id="9" name="テキスト ボックス 8">
+            <a:extLst>
+              <a:ext uri="{FF2B5EF4-FFF2-40B4-BE49-F238E27FC236}">
+                <a16:creationId xmlns:a16="http://schemas.microsoft.com/office/drawing/2014/main" id="{2749E13E-03F7-5457-6356-9C3350002F84}"/>
+              </a:ext>
+            </a:extLst>
+          </p:cNvPr>
+          <p:cNvSpPr txBox="1"/>
+          <p:nvPr/>
+        </p:nvSpPr>
+        <p:spPr>
+          <a:xfrm>
+            <a:off x="3191490" y="1940641"/>
+            <a:ext cx="620784" cy="369332"/>
+          </a:xfrm>
+          <a:prstGeom prst="rect">
+            <a:avLst/>
+          </a:prstGeom>
+          <a:noFill/>
+        </p:spPr>
+        <p:txBody>
+          <a:bodyPr wrap="square" rtlCol="0">
+            <a:spAutoFit/>
+          </a:bodyPr>
+          <a:lstStyle/>
+          <a:p>
+            <a:r>
+              <a:rPr kumimoji="1" lang="en-US" altLang="ja-JP" b="1">
+                <a:solidFill>
+                  <a:schemeClr val="bg1"/>
+                </a:solidFill>
+              </a:rPr>
+              <a:t>60</a:t>
+            </a:r>
+            <a:endParaRPr kumimoji="1" lang="ja-JP" altLang="en-US" b="1">
+              <a:solidFill>
+                <a:schemeClr val="bg1"/>
+              </a:solidFill>
+            </a:endParaRPr>
+          </a:p>
+        </p:txBody>
+      </p:sp>
+      <p:sp>
+        <p:nvSpPr>
+          <p:cNvPr id="10" name="テキスト ボックス 9">
+            <a:extLst>
+              <a:ext uri="{FF2B5EF4-FFF2-40B4-BE49-F238E27FC236}">
+                <a16:creationId xmlns:a16="http://schemas.microsoft.com/office/drawing/2014/main" id="{51DC811D-612D-A3B6-DF1B-DF930EBCCEAE}"/>
+              </a:ext>
+            </a:extLst>
+          </p:cNvPr>
+          <p:cNvSpPr txBox="1"/>
+          <p:nvPr/>
+        </p:nvSpPr>
+        <p:spPr>
+          <a:xfrm>
+            <a:off x="4833074" y="1915103"/>
+            <a:ext cx="620784" cy="369332"/>
+          </a:xfrm>
+          <a:prstGeom prst="rect">
+            <a:avLst/>
+          </a:prstGeom>
+          <a:noFill/>
+        </p:spPr>
+        <p:txBody>
+          <a:bodyPr wrap="square" rtlCol="0">
+            <a:spAutoFit/>
+          </a:bodyPr>
+          <a:lstStyle/>
+          <a:p>
+            <a:r>
+              <a:rPr lang="en-US" altLang="ja-JP">
+                <a:solidFill>
+                  <a:schemeClr val="bg1">
+                    <a:lumMod val="65000"/>
+                  </a:schemeClr>
+                </a:solidFill>
+              </a:rPr>
+              <a:t>30</a:t>
+            </a:r>
+            <a:endParaRPr kumimoji="1" lang="ja-JP" altLang="en-US">
+              <a:solidFill>
+                <a:schemeClr val="bg1">
+                  <a:lumMod val="65000"/>
+                </a:schemeClr>
+              </a:solidFill>
+            </a:endParaRPr>
+          </a:p>
+        </p:txBody>
+      </p:sp>
+      <p:sp>
+        <p:nvSpPr>
+          <p:cNvPr id="11" name="テキスト ボックス 10">
+            <a:extLst>
+              <a:ext uri="{FF2B5EF4-FFF2-40B4-BE49-F238E27FC236}">
+                <a16:creationId xmlns:a16="http://schemas.microsoft.com/office/drawing/2014/main" id="{2E69CFC2-A362-8AD4-48D2-63A11BB0377E}"/>
+              </a:ext>
+            </a:extLst>
+          </p:cNvPr>
+          <p:cNvSpPr txBox="1"/>
+          <p:nvPr/>
+        </p:nvSpPr>
+        <p:spPr>
+          <a:xfrm>
+            <a:off x="3191490" y="3404083"/>
+            <a:ext cx="989201" cy="369332"/>
+          </a:xfrm>
+          <a:prstGeom prst="rect">
+            <a:avLst/>
+          </a:prstGeom>
+          <a:noFill/>
+        </p:spPr>
+        <p:txBody>
+          <a:bodyPr wrap="square" rtlCol="0">
+            <a:spAutoFit/>
+          </a:bodyPr>
+          <a:lstStyle/>
+          <a:p>
+            <a:r>
+              <a:rPr kumimoji="1" lang="en-US" altLang="ja-JP" b="1">
+                <a:solidFill>
+                  <a:schemeClr val="bg1"/>
+                </a:solidFill>
+              </a:rPr>
+              <a:t>Show</a:t>
+            </a:r>
+            <a:endParaRPr kumimoji="1" lang="ja-JP" altLang="en-US" b="1">
+              <a:solidFill>
+                <a:schemeClr val="bg1"/>
+              </a:solidFill>
+            </a:endParaRPr>
+          </a:p>
+        </p:txBody>
+      </p:sp>
+      <p:sp>
+        <p:nvSpPr>
+          <p:cNvPr id="12" name="テキスト ボックス 11">
+            <a:extLst>
+              <a:ext uri="{FF2B5EF4-FFF2-40B4-BE49-F238E27FC236}">
+                <a16:creationId xmlns:a16="http://schemas.microsoft.com/office/drawing/2014/main" id="{BF3C4B40-6F92-38A2-4D35-4D10AB9A03C6}"/>
+              </a:ext>
+            </a:extLst>
+          </p:cNvPr>
+          <p:cNvSpPr txBox="1"/>
+          <p:nvPr/>
+        </p:nvSpPr>
+        <p:spPr>
+          <a:xfrm>
+            <a:off x="4833074" y="3415327"/>
+            <a:ext cx="989201" cy="369332"/>
+          </a:xfrm>
+          <a:prstGeom prst="rect">
+            <a:avLst/>
+          </a:prstGeom>
+          <a:noFill/>
+        </p:spPr>
+        <p:txBody>
+          <a:bodyPr wrap="square" rtlCol="0">
+            <a:spAutoFit/>
+          </a:bodyPr>
+          <a:lstStyle/>
+          <a:p>
+            <a:r>
+              <a:rPr kumimoji="1" lang="en-US" altLang="ja-JP">
+                <a:solidFill>
+                  <a:schemeClr val="bg1">
+                    <a:lumMod val="65000"/>
+                  </a:schemeClr>
+                </a:solidFill>
+              </a:rPr>
+              <a:t>Hide</a:t>
+            </a:r>
+            <a:endParaRPr kumimoji="1" lang="ja-JP" altLang="en-US">
+              <a:solidFill>
+                <a:schemeClr val="bg1">
+                  <a:lumMod val="65000"/>
+                </a:schemeClr>
+              </a:solidFill>
+            </a:endParaRPr>
+          </a:p>
+        </p:txBody>
+      </p:sp>
+      <p:pic>
+        <p:nvPicPr>
+          <p:cNvPr id="13" name="図 12">
+            <a:extLst>
+              <a:ext uri="{FF2B5EF4-FFF2-40B4-BE49-F238E27FC236}">
+                <a16:creationId xmlns:a16="http://schemas.microsoft.com/office/drawing/2014/main" id="{EAA82436-4395-6A70-938D-550721DD4960}"/>
+              </a:ext>
+            </a:extLst>
+          </p:cNvPr>
+          <p:cNvPicPr>
+            <a:picLocks noChangeAspect="1"/>
+          </p:cNvPicPr>
+          <p:nvPr/>
+        </p:nvPicPr>
+        <p:blipFill>
+          <a:blip r:embed="rId2">
+            <a:extLst>
+              <a:ext uri="{28A0092B-C50C-407E-A947-70E740481C1C}">
+                <a14:useLocalDpi xmlns:a14="http://schemas.microsoft.com/office/drawing/2010/main" val="0"/>
+              </a:ext>
+            </a:extLst>
+          </a:blip>
+          <a:stretch>
+            <a:fillRect/>
+          </a:stretch>
+        </p:blipFill>
+        <p:spPr>
+          <a:xfrm>
+            <a:off x="8494166" y="2122511"/>
+            <a:ext cx="609600" cy="609600"/>
+          </a:xfrm>
+          <a:prstGeom prst="rect">
+            <a:avLst/>
+          </a:prstGeom>
+        </p:spPr>
+      </p:pic>
+      <p:pic>
+        <p:nvPicPr>
+          <p:cNvPr id="14" name="図 13">
+            <a:extLst>
+              <a:ext uri="{FF2B5EF4-FFF2-40B4-BE49-F238E27FC236}">
+                <a16:creationId xmlns:a16="http://schemas.microsoft.com/office/drawing/2014/main" id="{D591F591-F266-C1B4-EEA6-4137E3253D25}"/>
+              </a:ext>
+            </a:extLst>
+          </p:cNvPr>
+          <p:cNvPicPr>
+            <a:picLocks noChangeAspect="1"/>
+          </p:cNvPicPr>
+          <p:nvPr/>
+        </p:nvPicPr>
+        <p:blipFill>
+          <a:blip r:embed="rId3">
+            <a:extLst>
+              <a:ext uri="{28A0092B-C50C-407E-A947-70E740481C1C}">
+                <a14:useLocalDpi xmlns:a14="http://schemas.microsoft.com/office/drawing/2010/main" val="0"/>
+              </a:ext>
+            </a:extLst>
+          </a:blip>
+          <a:stretch>
+            <a:fillRect/>
+          </a:stretch>
+        </p:blipFill>
+        <p:spPr>
+          <a:xfrm>
+            <a:off x="9103766" y="2122511"/>
+            <a:ext cx="609600" cy="609600"/>
+          </a:xfrm>
+          <a:prstGeom prst="rect">
+            <a:avLst/>
+          </a:prstGeom>
+        </p:spPr>
+      </p:pic>
+      <p:sp>
+        <p:nvSpPr>
+          <p:cNvPr id="15" name="テキスト ボックス 14">
+            <a:extLst>
+              <a:ext uri="{FF2B5EF4-FFF2-40B4-BE49-F238E27FC236}">
+                <a16:creationId xmlns:a16="http://schemas.microsoft.com/office/drawing/2014/main" id="{BE9F5136-8BD1-3F1B-8566-3B4103C46E81}"/>
+              </a:ext>
+            </a:extLst>
+          </p:cNvPr>
+          <p:cNvSpPr txBox="1"/>
+          <p:nvPr/>
+        </p:nvSpPr>
+        <p:spPr>
+          <a:xfrm>
+            <a:off x="9804247" y="2242645"/>
+            <a:ext cx="1898032" cy="369332"/>
+          </a:xfrm>
+          <a:prstGeom prst="rect">
+            <a:avLst/>
+          </a:prstGeom>
+          <a:noFill/>
+        </p:spPr>
+        <p:txBody>
+          <a:bodyPr wrap="square" rtlCol="0">
+            <a:spAutoFit/>
+          </a:bodyPr>
+          <a:lstStyle/>
+          <a:p>
+            <a:r>
+              <a:rPr lang="en-US" altLang="ja-JP">
+                <a:solidFill>
+                  <a:schemeClr val="bg1"/>
+                </a:solidFill>
+              </a:rPr>
+              <a:t>S</a:t>
+            </a:r>
+            <a:r>
+              <a:rPr kumimoji="1" lang="en-US" altLang="ja-JP">
+                <a:solidFill>
+                  <a:schemeClr val="bg1"/>
+                </a:solidFill>
+              </a:rPr>
+              <a:t>elect Option</a:t>
+            </a:r>
+            <a:endParaRPr kumimoji="1" lang="ja-JP" altLang="en-US">
+              <a:solidFill>
+                <a:schemeClr val="bg1"/>
+              </a:solidFill>
+            </a:endParaRPr>
+          </a:p>
+        </p:txBody>
+      </p:sp>
+      <p:pic>
+        <p:nvPicPr>
+          <p:cNvPr id="16" name="図 15">
+            <a:extLst>
+              <a:ext uri="{FF2B5EF4-FFF2-40B4-BE49-F238E27FC236}">
+                <a16:creationId xmlns:a16="http://schemas.microsoft.com/office/drawing/2014/main" id="{C24910A6-95D5-1B44-3C73-586028B4CB70}"/>
+              </a:ext>
+            </a:extLst>
+          </p:cNvPr>
+          <p:cNvPicPr>
+            <a:picLocks noChangeAspect="1"/>
+          </p:cNvPicPr>
+          <p:nvPr/>
+        </p:nvPicPr>
+        <p:blipFill>
+          <a:blip r:embed="rId4">
+            <a:extLst>
+              <a:ext uri="{28A0092B-C50C-407E-A947-70E740481C1C}">
+                <a14:useLocalDpi xmlns:a14="http://schemas.microsoft.com/office/drawing/2010/main" val="0"/>
+              </a:ext>
+            </a:extLst>
+          </a:blip>
+          <a:stretch>
+            <a:fillRect/>
+          </a:stretch>
+        </p:blipFill>
+        <p:spPr>
+          <a:xfrm>
+            <a:off x="8494166" y="2830403"/>
+            <a:ext cx="609600" cy="609600"/>
+          </a:xfrm>
+          <a:prstGeom prst="rect">
+            <a:avLst/>
+          </a:prstGeom>
+        </p:spPr>
+      </p:pic>
+      <p:pic>
+        <p:nvPicPr>
+          <p:cNvPr id="17" name="図 16">
+            <a:extLst>
+              <a:ext uri="{FF2B5EF4-FFF2-40B4-BE49-F238E27FC236}">
+                <a16:creationId xmlns:a16="http://schemas.microsoft.com/office/drawing/2014/main" id="{123718F1-879A-EF1A-C283-033DA1399745}"/>
+              </a:ext>
+            </a:extLst>
+          </p:cNvPr>
+          <p:cNvPicPr>
+            <a:picLocks noChangeAspect="1"/>
+          </p:cNvPicPr>
+          <p:nvPr/>
+        </p:nvPicPr>
+        <p:blipFill>
+          <a:blip r:embed="rId5">
+            <a:extLst>
+              <a:ext uri="{28A0092B-C50C-407E-A947-70E740481C1C}">
+                <a14:useLocalDpi xmlns:a14="http://schemas.microsoft.com/office/drawing/2010/main" val="0"/>
+              </a:ext>
+            </a:extLst>
+          </a:blip>
+          <a:stretch>
+            <a:fillRect/>
+          </a:stretch>
+        </p:blipFill>
+        <p:spPr>
+          <a:xfrm>
+            <a:off x="9071647" y="2818689"/>
+            <a:ext cx="609600" cy="609600"/>
+          </a:xfrm>
+          <a:prstGeom prst="rect">
+            <a:avLst/>
+          </a:prstGeom>
+        </p:spPr>
+      </p:pic>
+      <p:sp>
+        <p:nvSpPr>
+          <p:cNvPr id="18" name="テキスト ボックス 17">
+            <a:extLst>
+              <a:ext uri="{FF2B5EF4-FFF2-40B4-BE49-F238E27FC236}">
+                <a16:creationId xmlns:a16="http://schemas.microsoft.com/office/drawing/2014/main" id="{D240A78E-8EE4-9E22-ACCB-A0E84231AD06}"/>
+              </a:ext>
+            </a:extLst>
+          </p:cNvPr>
+          <p:cNvSpPr txBox="1"/>
+          <p:nvPr/>
+        </p:nvSpPr>
+        <p:spPr>
+          <a:xfrm>
+            <a:off x="9801917" y="2950537"/>
+            <a:ext cx="1900362" cy="369332"/>
+          </a:xfrm>
+          <a:prstGeom prst="rect">
+            <a:avLst/>
+          </a:prstGeom>
+          <a:noFill/>
+        </p:spPr>
+        <p:txBody>
+          <a:bodyPr wrap="square" rtlCol="0">
+            <a:spAutoFit/>
+          </a:bodyPr>
+          <a:lstStyle/>
+          <a:p>
+            <a:r>
+              <a:rPr lang="ja-JP" altLang="ja-JP">
+                <a:solidFill>
+                  <a:schemeClr val="bg1"/>
+                </a:solidFill>
+              </a:rPr>
+              <a:t>Change Option</a:t>
+            </a:r>
+            <a:endParaRPr kumimoji="1" lang="ja-JP" altLang="en-US">
+              <a:solidFill>
+                <a:schemeClr val="bg1"/>
+              </a:solidFill>
+            </a:endParaRPr>
+          </a:p>
+        </p:txBody>
+      </p:sp>
+      <p:sp>
+        <p:nvSpPr>
+          <p:cNvPr id="19" name="テキスト ボックス 18">
+            <a:extLst>
+              <a:ext uri="{FF2B5EF4-FFF2-40B4-BE49-F238E27FC236}">
+                <a16:creationId xmlns:a16="http://schemas.microsoft.com/office/drawing/2014/main" id="{35C74972-54F3-E834-A5C7-77D2B7BB108E}"/>
+              </a:ext>
+            </a:extLst>
+          </p:cNvPr>
+          <p:cNvSpPr txBox="1"/>
+          <p:nvPr/>
+        </p:nvSpPr>
+        <p:spPr>
+          <a:xfrm>
+            <a:off x="526079" y="6414214"/>
+            <a:ext cx="2547804" cy="369332"/>
+          </a:xfrm>
+          <a:prstGeom prst="rect">
+            <a:avLst/>
+          </a:prstGeom>
+          <a:noFill/>
+        </p:spPr>
+        <p:txBody>
+          <a:bodyPr wrap="square" rtlCol="0">
+            <a:spAutoFit/>
+          </a:bodyPr>
+          <a:lstStyle/>
+          <a:p>
+            <a:r>
+              <a:rPr kumimoji="1" lang="en-US" altLang="ja-JP">
+                <a:solidFill>
+                  <a:schemeClr val="bg1"/>
+                </a:solidFill>
+              </a:rPr>
+              <a:t>Saved!</a:t>
+            </a:r>
+            <a:endParaRPr kumimoji="1" lang="ja-JP" altLang="en-US">
+              <a:solidFill>
+                <a:schemeClr val="bg1"/>
+              </a:solidFill>
+            </a:endParaRPr>
+          </a:p>
+        </p:txBody>
+      </p:sp>
+      <p:pic>
+        <p:nvPicPr>
+          <p:cNvPr id="21" name="図 20">
+            <a:extLst>
+              <a:ext uri="{FF2B5EF4-FFF2-40B4-BE49-F238E27FC236}">
+                <a16:creationId xmlns:a16="http://schemas.microsoft.com/office/drawing/2014/main" id="{1781EE38-798A-B4D5-F5F2-8E831947846D}"/>
+              </a:ext>
+            </a:extLst>
+          </p:cNvPr>
+          <p:cNvPicPr>
+            <a:picLocks noChangeAspect="1"/>
+          </p:cNvPicPr>
+          <p:nvPr/>
+        </p:nvPicPr>
+        <p:blipFill>
+          <a:blip r:embed="rId6">
+            <a:extLst>
+              <a:ext uri="{28A0092B-C50C-407E-A947-70E740481C1C}">
+                <a14:useLocalDpi xmlns:a14="http://schemas.microsoft.com/office/drawing/2010/main" val="0"/>
+              </a:ext>
+            </a:extLst>
+          </a:blip>
+          <a:stretch>
+            <a:fillRect/>
+          </a:stretch>
+        </p:blipFill>
+        <p:spPr>
+          <a:xfrm>
+            <a:off x="8494166" y="3538295"/>
+            <a:ext cx="609600" cy="609600"/>
+          </a:xfrm>
+          <a:prstGeom prst="rect">
+            <a:avLst/>
+          </a:prstGeom>
+        </p:spPr>
+      </p:pic>
+      <p:sp>
+        <p:nvSpPr>
+          <p:cNvPr id="22" name="テキスト ボックス 21">
+            <a:extLst>
+              <a:ext uri="{FF2B5EF4-FFF2-40B4-BE49-F238E27FC236}">
+                <a16:creationId xmlns:a16="http://schemas.microsoft.com/office/drawing/2014/main" id="{F3A2E0B5-3990-B560-20DA-4AB41ADD9C53}"/>
+              </a:ext>
+            </a:extLst>
+          </p:cNvPr>
+          <p:cNvSpPr txBox="1"/>
+          <p:nvPr/>
+        </p:nvSpPr>
+        <p:spPr>
+          <a:xfrm>
+            <a:off x="9261549" y="3658429"/>
+            <a:ext cx="2101652" cy="369332"/>
+          </a:xfrm>
+          <a:prstGeom prst="rect">
+            <a:avLst/>
+          </a:prstGeom>
+          <a:noFill/>
+        </p:spPr>
+        <p:txBody>
+          <a:bodyPr wrap="square">
+            <a:spAutoFit/>
+          </a:bodyPr>
+          <a:lstStyle/>
+          <a:p>
+            <a:r>
+              <a:rPr lang="en-US" altLang="ja-JP">
+                <a:solidFill>
+                  <a:schemeClr val="bg1"/>
+                </a:solidFill>
+              </a:rPr>
+              <a:t>Return to Title</a:t>
+            </a:r>
+            <a:endParaRPr lang="ja-JP" altLang="en-US">
+              <a:solidFill>
+                <a:schemeClr val="bg1"/>
+              </a:solidFill>
+            </a:endParaRPr>
+          </a:p>
+        </p:txBody>
+      </p:sp>
+      <p:sp>
+        <p:nvSpPr>
+          <p:cNvPr id="23" name="テキスト ボックス 22">
+            <a:extLst>
+              <a:ext uri="{FF2B5EF4-FFF2-40B4-BE49-F238E27FC236}">
+                <a16:creationId xmlns:a16="http://schemas.microsoft.com/office/drawing/2014/main" id="{3196A32F-FFC4-E78A-E409-B38C210D3C36}"/>
+              </a:ext>
+            </a:extLst>
+          </p:cNvPr>
+          <p:cNvSpPr txBox="1"/>
+          <p:nvPr/>
+        </p:nvSpPr>
+        <p:spPr>
+          <a:xfrm>
+            <a:off x="636128" y="2382925"/>
+            <a:ext cx="1888609" cy="369332"/>
+          </a:xfrm>
+          <a:prstGeom prst="rect">
+            <a:avLst/>
+          </a:prstGeom>
+          <a:noFill/>
+        </p:spPr>
+        <p:txBody>
+          <a:bodyPr wrap="square" rtlCol="0">
+            <a:spAutoFit/>
+          </a:bodyPr>
+          <a:lstStyle/>
+          <a:p>
+            <a:pPr algn="r"/>
+            <a:r>
+              <a:rPr kumimoji="1" lang="en-US" altLang="ja-JP">
+                <a:solidFill>
+                  <a:schemeClr val="bg1">
+                    <a:lumMod val="65000"/>
+                  </a:schemeClr>
+                </a:solidFill>
+              </a:rPr>
+              <a:t>SE Volume</a:t>
+            </a:r>
+            <a:endParaRPr kumimoji="1" lang="ja-JP" altLang="en-US">
+              <a:solidFill>
+                <a:schemeClr val="bg1">
+                  <a:lumMod val="65000"/>
+                </a:schemeClr>
+              </a:solidFill>
+            </a:endParaRPr>
+          </a:p>
+        </p:txBody>
+      </p:sp>
+      <p:sp>
+        <p:nvSpPr>
+          <p:cNvPr id="24" name="テキスト ボックス 23">
+            <a:extLst>
+              <a:ext uri="{FF2B5EF4-FFF2-40B4-BE49-F238E27FC236}">
+                <a16:creationId xmlns:a16="http://schemas.microsoft.com/office/drawing/2014/main" id="{A557CABD-059B-1F9B-D619-300169F57B70}"/>
+              </a:ext>
+            </a:extLst>
+          </p:cNvPr>
+          <p:cNvSpPr txBox="1"/>
+          <p:nvPr/>
+        </p:nvSpPr>
+        <p:spPr>
+          <a:xfrm>
+            <a:off x="636128" y="2852709"/>
+            <a:ext cx="1888609" cy="369332"/>
+          </a:xfrm>
+          <a:prstGeom prst="rect">
+            <a:avLst/>
+          </a:prstGeom>
+          <a:noFill/>
+        </p:spPr>
+        <p:txBody>
+          <a:bodyPr wrap="square" rtlCol="0">
+            <a:spAutoFit/>
+          </a:bodyPr>
+          <a:lstStyle/>
+          <a:p>
+            <a:pPr algn="r"/>
+            <a:r>
+              <a:rPr lang="en-US" altLang="ja-JP">
+                <a:solidFill>
+                  <a:schemeClr val="bg1">
+                    <a:lumMod val="65000"/>
+                  </a:schemeClr>
+                </a:solidFill>
+              </a:rPr>
+              <a:t>BGM</a:t>
+            </a:r>
+            <a:r>
+              <a:rPr kumimoji="1" lang="en-US" altLang="ja-JP">
+                <a:solidFill>
+                  <a:schemeClr val="bg1">
+                    <a:lumMod val="65000"/>
+                  </a:schemeClr>
+                </a:solidFill>
+              </a:rPr>
+              <a:t> Volume</a:t>
+            </a:r>
+            <a:endParaRPr kumimoji="1" lang="ja-JP" altLang="en-US">
+              <a:solidFill>
+                <a:schemeClr val="bg1">
+                  <a:lumMod val="65000"/>
+                </a:schemeClr>
+              </a:solidFill>
+            </a:endParaRPr>
+          </a:p>
+        </p:txBody>
+      </p:sp>
+      <p:pic>
+        <p:nvPicPr>
+          <p:cNvPr id="27" name="図 26">
+            <a:extLst>
+              <a:ext uri="{FF2B5EF4-FFF2-40B4-BE49-F238E27FC236}">
+                <a16:creationId xmlns:a16="http://schemas.microsoft.com/office/drawing/2014/main" id="{199571A0-9C43-1A42-8BD9-B87BA2D4F080}"/>
+              </a:ext>
+            </a:extLst>
+          </p:cNvPr>
+          <p:cNvPicPr>
+            <a:picLocks noChangeAspect="1"/>
+          </p:cNvPicPr>
+          <p:nvPr/>
+        </p:nvPicPr>
+        <p:blipFill>
+          <a:blip r:embed="rId7">
+            <a:extLst>
+              <a:ext uri="{28A0092B-C50C-407E-A947-70E740481C1C}">
+                <a14:useLocalDpi xmlns:a14="http://schemas.microsoft.com/office/drawing/2010/main" val="0"/>
+              </a:ext>
+            </a:extLst>
+          </a:blip>
+          <a:stretch>
+            <a:fillRect/>
+          </a:stretch>
+        </p:blipFill>
+        <p:spPr>
+          <a:xfrm>
+            <a:off x="209725" y="6456005"/>
+            <a:ext cx="285750" cy="285750"/>
+          </a:xfrm>
+          <a:prstGeom prst="rect">
+            <a:avLst/>
+          </a:prstGeom>
+        </p:spPr>
+      </p:pic>
+      <p:sp>
+        <p:nvSpPr>
+          <p:cNvPr id="29" name="テキスト ボックス 28">
+            <a:extLst>
+              <a:ext uri="{FF2B5EF4-FFF2-40B4-BE49-F238E27FC236}">
+                <a16:creationId xmlns:a16="http://schemas.microsoft.com/office/drawing/2014/main" id="{25F055C3-19FD-CD26-3459-9E79D94ECE69}"/>
+              </a:ext>
+            </a:extLst>
+          </p:cNvPr>
+          <p:cNvSpPr txBox="1"/>
+          <p:nvPr/>
+        </p:nvSpPr>
+        <p:spPr>
+          <a:xfrm>
+            <a:off x="3191490" y="2382925"/>
+            <a:ext cx="2738642" cy="369332"/>
+          </a:xfrm>
+          <a:prstGeom prst="rect">
+            <a:avLst/>
+          </a:prstGeom>
+          <a:noFill/>
+        </p:spPr>
+        <p:txBody>
+          <a:bodyPr wrap="square" rtlCol="0">
+            <a:spAutoFit/>
+          </a:bodyPr>
+          <a:lstStyle/>
+          <a:p>
+            <a:r>
+              <a:rPr lang="en-US" altLang="ja-JP">
+                <a:solidFill>
+                  <a:schemeClr val="bg1">
+                    <a:lumMod val="65000"/>
+                  </a:schemeClr>
+                </a:solidFill>
+              </a:rPr>
+              <a:t>0  1  2  3  4  </a:t>
+            </a:r>
+            <a:r>
+              <a:rPr lang="en-US" altLang="ja-JP" b="1">
+                <a:solidFill>
+                  <a:schemeClr val="bg1"/>
+                </a:solidFill>
+              </a:rPr>
+              <a:t>5</a:t>
+            </a:r>
+            <a:r>
+              <a:rPr lang="en-US" altLang="ja-JP">
+                <a:solidFill>
+                  <a:schemeClr val="bg1">
+                    <a:lumMod val="65000"/>
+                  </a:schemeClr>
+                </a:solidFill>
+              </a:rPr>
+              <a:t>  6  7  8  9</a:t>
+            </a:r>
+            <a:endParaRPr kumimoji="1" lang="ja-JP" altLang="en-US">
+              <a:solidFill>
+                <a:schemeClr val="bg1">
+                  <a:lumMod val="65000"/>
+                </a:schemeClr>
+              </a:solidFill>
+            </a:endParaRPr>
+          </a:p>
+        </p:txBody>
+      </p:sp>
+      <p:sp>
+        <p:nvSpPr>
+          <p:cNvPr id="31" name="テキスト ボックス 30">
+            <a:extLst>
+              <a:ext uri="{FF2B5EF4-FFF2-40B4-BE49-F238E27FC236}">
+                <a16:creationId xmlns:a16="http://schemas.microsoft.com/office/drawing/2014/main" id="{9463B8D5-49B3-561A-AAE3-E0B57216C7AF}"/>
+              </a:ext>
+            </a:extLst>
+          </p:cNvPr>
+          <p:cNvSpPr txBox="1"/>
+          <p:nvPr/>
+        </p:nvSpPr>
+        <p:spPr>
+          <a:xfrm>
+            <a:off x="3191490" y="2852709"/>
+            <a:ext cx="2738642" cy="369332"/>
+          </a:xfrm>
+          <a:prstGeom prst="rect">
+            <a:avLst/>
+          </a:prstGeom>
+          <a:noFill/>
+        </p:spPr>
+        <p:txBody>
+          <a:bodyPr wrap="square" rtlCol="0">
+            <a:spAutoFit/>
+          </a:bodyPr>
+          <a:lstStyle/>
+          <a:p>
+            <a:r>
+              <a:rPr lang="en-US" altLang="ja-JP">
+                <a:solidFill>
+                  <a:schemeClr val="bg1">
+                    <a:lumMod val="65000"/>
+                  </a:schemeClr>
+                </a:solidFill>
+              </a:rPr>
+              <a:t>0  1  2  3  4  </a:t>
+            </a:r>
+            <a:r>
+              <a:rPr lang="en-US" altLang="ja-JP" b="1">
+                <a:solidFill>
+                  <a:schemeClr val="bg1"/>
+                </a:solidFill>
+              </a:rPr>
+              <a:t>5</a:t>
+            </a:r>
+            <a:r>
+              <a:rPr lang="en-US" altLang="ja-JP">
+                <a:solidFill>
+                  <a:schemeClr val="bg1">
+                    <a:lumMod val="65000"/>
+                  </a:schemeClr>
+                </a:solidFill>
+              </a:rPr>
+              <a:t>  6  7  8  9</a:t>
+            </a:r>
+            <a:endParaRPr kumimoji="1" lang="ja-JP" altLang="en-US">
+              <a:solidFill>
+                <a:schemeClr val="bg1">
+                  <a:lumMod val="65000"/>
+                </a:schemeClr>
+              </a:solidFill>
+            </a:endParaRPr>
+          </a:p>
+        </p:txBody>
+      </p:sp>
+      <p:sp>
+        <p:nvSpPr>
+          <p:cNvPr id="33" name="テキスト ボックス 32">
+            <a:extLst>
+              <a:ext uri="{FF2B5EF4-FFF2-40B4-BE49-F238E27FC236}">
+                <a16:creationId xmlns:a16="http://schemas.microsoft.com/office/drawing/2014/main" id="{E991BC1F-77D1-8D1E-37C4-921CC21FB86F}"/>
+              </a:ext>
+            </a:extLst>
+          </p:cNvPr>
+          <p:cNvSpPr txBox="1"/>
+          <p:nvPr/>
+        </p:nvSpPr>
+        <p:spPr>
+          <a:xfrm>
+            <a:off x="209725" y="4155180"/>
+            <a:ext cx="2281806" cy="369332"/>
+          </a:xfrm>
+          <a:prstGeom prst="rect">
+            <a:avLst/>
+          </a:prstGeom>
+          <a:noFill/>
+        </p:spPr>
+        <p:txBody>
+          <a:bodyPr wrap="square" rtlCol="0">
+            <a:spAutoFit/>
+          </a:bodyPr>
+          <a:lstStyle/>
+          <a:p>
+            <a:pPr algn="r"/>
+            <a:r>
+              <a:rPr kumimoji="1" lang="en-US" altLang="ja-JP">
+                <a:solidFill>
+                  <a:schemeClr val="bg1">
+                    <a:lumMod val="65000"/>
+                  </a:schemeClr>
+                </a:solidFill>
+              </a:rPr>
+              <a:t>Dino Control</a:t>
+            </a:r>
+            <a:endParaRPr kumimoji="1" lang="ja-JP" altLang="en-US">
+              <a:solidFill>
+                <a:schemeClr val="bg1">
+                  <a:lumMod val="65000"/>
+                </a:schemeClr>
+              </a:solidFill>
+            </a:endParaRPr>
+          </a:p>
+        </p:txBody>
+      </p:sp>
+      <p:sp>
+        <p:nvSpPr>
+          <p:cNvPr id="35" name="テキスト ボックス 34">
+            <a:extLst>
+              <a:ext uri="{FF2B5EF4-FFF2-40B4-BE49-F238E27FC236}">
+                <a16:creationId xmlns:a16="http://schemas.microsoft.com/office/drawing/2014/main" id="{8EF3E76C-F9AE-848C-8D9E-9DB4A84C7130}"/>
+              </a:ext>
+            </a:extLst>
+          </p:cNvPr>
+          <p:cNvSpPr txBox="1"/>
+          <p:nvPr/>
+        </p:nvSpPr>
+        <p:spPr>
+          <a:xfrm>
+            <a:off x="3191490" y="3981640"/>
+            <a:ext cx="2328467" cy="646331"/>
+          </a:xfrm>
+          <a:prstGeom prst="rect">
+            <a:avLst/>
+          </a:prstGeom>
+          <a:noFill/>
+        </p:spPr>
+        <p:txBody>
+          <a:bodyPr wrap="square" rtlCol="0">
+            <a:spAutoFit/>
+          </a:bodyPr>
+          <a:lstStyle/>
+          <a:p>
+            <a:r>
+              <a:rPr lang="en-US" altLang="ja-JP" b="1">
+                <a:solidFill>
+                  <a:schemeClr val="bg1"/>
+                </a:solidFill>
+              </a:rPr>
+              <a:t>Arrows</a:t>
+            </a:r>
+          </a:p>
+          <a:p>
+            <a:r>
+              <a:rPr lang="en-US" altLang="ja-JP" b="1">
+                <a:solidFill>
+                  <a:schemeClr val="bg1"/>
+                </a:solidFill>
+              </a:rPr>
+              <a:t>+ Space</a:t>
+            </a:r>
+            <a:endParaRPr kumimoji="1" lang="ja-JP" altLang="en-US" b="1">
+              <a:solidFill>
+                <a:schemeClr val="bg1"/>
+              </a:solidFill>
+            </a:endParaRPr>
+          </a:p>
+        </p:txBody>
+      </p:sp>
+      <p:sp>
+        <p:nvSpPr>
+          <p:cNvPr id="37" name="テキスト ボックス 36">
+            <a:extLst>
+              <a:ext uri="{FF2B5EF4-FFF2-40B4-BE49-F238E27FC236}">
+                <a16:creationId xmlns:a16="http://schemas.microsoft.com/office/drawing/2014/main" id="{754CF970-960A-569E-D09C-BCC5ECCE714A}"/>
+              </a:ext>
+            </a:extLst>
+          </p:cNvPr>
+          <p:cNvSpPr txBox="1"/>
+          <p:nvPr/>
+        </p:nvSpPr>
+        <p:spPr>
+          <a:xfrm>
+            <a:off x="4833074" y="3981640"/>
+            <a:ext cx="1936523" cy="646331"/>
+          </a:xfrm>
+          <a:prstGeom prst="rect">
+            <a:avLst/>
+          </a:prstGeom>
+          <a:noFill/>
+        </p:spPr>
+        <p:txBody>
+          <a:bodyPr wrap="square" rtlCol="0">
+            <a:spAutoFit/>
+          </a:bodyPr>
+          <a:lstStyle/>
+          <a:p>
+            <a:r>
+              <a:rPr lang="en-US" altLang="ja-JP">
+                <a:solidFill>
+                  <a:schemeClr val="bg1">
+                    <a:lumMod val="65000"/>
+                  </a:schemeClr>
+                </a:solidFill>
+              </a:rPr>
+              <a:t>WASD</a:t>
+            </a:r>
+          </a:p>
+          <a:p>
+            <a:r>
+              <a:rPr lang="en-US" altLang="ja-JP">
+                <a:solidFill>
+                  <a:schemeClr val="bg1">
+                    <a:lumMod val="65000"/>
+                  </a:schemeClr>
+                </a:solidFill>
+              </a:rPr>
+              <a:t>+ Enter</a:t>
+            </a:r>
+            <a:endParaRPr kumimoji="1" lang="ja-JP" altLang="en-US">
+              <a:solidFill>
+                <a:schemeClr val="bg1">
+                  <a:lumMod val="65000"/>
+                </a:schemeClr>
+              </a:solidFill>
+            </a:endParaRPr>
+          </a:p>
+        </p:txBody>
+      </p:sp>
+    </p:spTree>
+    <p:extLst>
+      <p:ext uri="{BB962C8B-B14F-4D97-AF65-F5344CB8AC3E}">
+        <p14:creationId xmlns:p14="http://schemas.microsoft.com/office/powerpoint/2010/main" val="3237393404"/>
       </p:ext>
     </p:extLst>
   </p:cSld>

--- a/SuperChromeDino/notebook/slide.pptx
+++ b/SuperChromeDino/notebook/slide.pptx
@@ -5,7 +5,7 @@
     <p:sldMasterId id="2147483648" r:id="rId1"/>
   </p:sldMasterIdLst>
   <p:notesMasterIdLst>
-    <p:notesMasterId r:id="rId7"/>
+    <p:notesMasterId r:id="rId8"/>
   </p:notesMasterIdLst>
   <p:sldIdLst>
     <p:sldId id="258" r:id="rId2"/>
@@ -13,6 +13,7 @@
     <p:sldId id="259" r:id="rId4"/>
     <p:sldId id="260" r:id="rId5"/>
     <p:sldId id="261" r:id="rId6"/>
+    <p:sldId id="262" r:id="rId7"/>
   </p:sldIdLst>
   <p:sldSz cx="12192000" cy="6858000"/>
   <p:notesSz cx="6858000" cy="9144000"/>
@@ -201,7 +202,7 @@
           <a:p>
             <a:fld id="{00C41961-FE8A-4BE1-9DDF-15BBD058F0FA}" type="datetimeFigureOut">
               <a:rPr kumimoji="1" lang="ja-JP" altLang="en-US" smtClean="0"/>
-              <a:t>2026/5/30</a:t>
+              <a:t>2026/5/31</a:t>
             </a:fld>
             <a:endParaRPr kumimoji="1" lang="ja-JP" altLang="en-US"/>
           </a:p>
@@ -731,7 +732,7 @@
           <a:p>
             <a:fld id="{8BB06768-D803-4A2A-94D0-49F2EC2B67A1}" type="datetimeFigureOut">
               <a:rPr kumimoji="1" lang="ja-JP" altLang="en-US" smtClean="0"/>
-              <a:t>2026/5/30</a:t>
+              <a:t>2026/5/31</a:t>
             </a:fld>
             <a:endParaRPr kumimoji="1" lang="ja-JP" altLang="en-US"/>
           </a:p>
@@ -961,7 +962,7 @@
           <a:p>
             <a:fld id="{8BB06768-D803-4A2A-94D0-49F2EC2B67A1}" type="datetimeFigureOut">
               <a:rPr kumimoji="1" lang="ja-JP" altLang="en-US" smtClean="0"/>
-              <a:t>2026/5/30</a:t>
+              <a:t>2026/5/31</a:t>
             </a:fld>
             <a:endParaRPr kumimoji="1" lang="ja-JP" altLang="en-US"/>
           </a:p>
@@ -1201,7 +1202,7 @@
           <a:p>
             <a:fld id="{8BB06768-D803-4A2A-94D0-49F2EC2B67A1}" type="datetimeFigureOut">
               <a:rPr kumimoji="1" lang="ja-JP" altLang="en-US" smtClean="0"/>
-              <a:t>2026/5/30</a:t>
+              <a:t>2026/5/31</a:t>
             </a:fld>
             <a:endParaRPr kumimoji="1" lang="ja-JP" altLang="en-US"/>
           </a:p>
@@ -1431,7 +1432,7 @@
           <a:p>
             <a:fld id="{8BB06768-D803-4A2A-94D0-49F2EC2B67A1}" type="datetimeFigureOut">
               <a:rPr kumimoji="1" lang="ja-JP" altLang="en-US" smtClean="0"/>
-              <a:t>2026/5/30</a:t>
+              <a:t>2026/5/31</a:t>
             </a:fld>
             <a:endParaRPr kumimoji="1" lang="ja-JP" altLang="en-US"/>
           </a:p>
@@ -1706,7 +1707,7 @@
           <a:p>
             <a:fld id="{8BB06768-D803-4A2A-94D0-49F2EC2B67A1}" type="datetimeFigureOut">
               <a:rPr kumimoji="1" lang="ja-JP" altLang="en-US" smtClean="0"/>
-              <a:t>2026/5/30</a:t>
+              <a:t>2026/5/31</a:t>
             </a:fld>
             <a:endParaRPr kumimoji="1" lang="ja-JP" altLang="en-US"/>
           </a:p>
@@ -2035,7 +2036,7 @@
           <a:p>
             <a:fld id="{8BB06768-D803-4A2A-94D0-49F2EC2B67A1}" type="datetimeFigureOut">
               <a:rPr kumimoji="1" lang="ja-JP" altLang="en-US" smtClean="0"/>
-              <a:t>2026/5/30</a:t>
+              <a:t>2026/5/31</a:t>
             </a:fld>
             <a:endParaRPr kumimoji="1" lang="ja-JP" altLang="en-US"/>
           </a:p>
@@ -2511,7 +2512,7 @@
           <a:p>
             <a:fld id="{8BB06768-D803-4A2A-94D0-49F2EC2B67A1}" type="datetimeFigureOut">
               <a:rPr kumimoji="1" lang="ja-JP" altLang="en-US" smtClean="0"/>
-              <a:t>2026/5/30</a:t>
+              <a:t>2026/5/31</a:t>
             </a:fld>
             <a:endParaRPr kumimoji="1" lang="ja-JP" altLang="en-US"/>
           </a:p>
@@ -2652,7 +2653,7 @@
           <a:p>
             <a:fld id="{8BB06768-D803-4A2A-94D0-49F2EC2B67A1}" type="datetimeFigureOut">
               <a:rPr kumimoji="1" lang="ja-JP" altLang="en-US" smtClean="0"/>
-              <a:t>2026/5/30</a:t>
+              <a:t>2026/5/31</a:t>
             </a:fld>
             <a:endParaRPr kumimoji="1" lang="ja-JP" altLang="en-US"/>
           </a:p>
@@ -2765,7 +2766,7 @@
           <a:p>
             <a:fld id="{8BB06768-D803-4A2A-94D0-49F2EC2B67A1}" type="datetimeFigureOut">
               <a:rPr kumimoji="1" lang="ja-JP" altLang="en-US" smtClean="0"/>
-              <a:t>2026/5/30</a:t>
+              <a:t>2026/5/31</a:t>
             </a:fld>
             <a:endParaRPr kumimoji="1" lang="ja-JP" altLang="en-US"/>
           </a:p>
@@ -3108,7 +3109,7 @@
           <a:p>
             <a:fld id="{8BB06768-D803-4A2A-94D0-49F2EC2B67A1}" type="datetimeFigureOut">
               <a:rPr kumimoji="1" lang="ja-JP" altLang="en-US" smtClean="0"/>
-              <a:t>2026/5/30</a:t>
+              <a:t>2026/5/31</a:t>
             </a:fld>
             <a:endParaRPr kumimoji="1" lang="ja-JP" altLang="en-US"/>
           </a:p>
@@ -3396,7 +3397,7 @@
           <a:p>
             <a:fld id="{8BB06768-D803-4A2A-94D0-49F2EC2B67A1}" type="datetimeFigureOut">
               <a:rPr kumimoji="1" lang="ja-JP" altLang="en-US" smtClean="0"/>
-              <a:t>2026/5/30</a:t>
+              <a:t>2026/5/31</a:t>
             </a:fld>
             <a:endParaRPr kumimoji="1" lang="ja-JP" altLang="en-US"/>
           </a:p>
@@ -3669,7 +3670,7 @@
           <a:p>
             <a:fld id="{8BB06768-D803-4A2A-94D0-49F2EC2B67A1}" type="datetimeFigureOut">
               <a:rPr kumimoji="1" lang="ja-JP" altLang="en-US" smtClean="0"/>
-              <a:t>2026/5/30</a:t>
+              <a:t>2026/5/31</a:t>
             </a:fld>
             <a:endParaRPr kumimoji="1" lang="ja-JP" altLang="en-US"/>
           </a:p>
@@ -7674,6 +7675,132 @@
     <p:extLst>
       <p:ext uri="{BB962C8B-B14F-4D97-AF65-F5344CB8AC3E}">
         <p14:creationId xmlns:p14="http://schemas.microsoft.com/office/powerpoint/2010/main" val="3237393404"/>
+      </p:ext>
+    </p:extLst>
+  </p:cSld>
+  <p:clrMapOvr>
+    <a:masterClrMapping/>
+  </p:clrMapOvr>
+</p:sld>
+</file>
+
+<file path=ppt/slides/slide6.xml><?xml version="1.0" encoding="utf-8"?>
+<p:sld xmlns:a="http://schemas.openxmlformats.org/drawingml/2006/main" xmlns:r="http://schemas.openxmlformats.org/officeDocument/2006/relationships" xmlns:p="http://schemas.openxmlformats.org/presentationml/2006/main">
+  <p:cSld>
+    <p:bg>
+      <p:bgPr>
+        <a:solidFill>
+          <a:schemeClr val="tx1"/>
+        </a:solidFill>
+        <a:effectLst/>
+      </p:bgPr>
+    </p:bg>
+    <p:spTree>
+      <p:nvGrpSpPr>
+        <p:cNvPr id="1" name=""/>
+        <p:cNvGrpSpPr/>
+        <p:nvPr/>
+      </p:nvGrpSpPr>
+      <p:grpSpPr>
+        <a:xfrm>
+          <a:off x="0" y="0"/>
+          <a:ext cx="0" cy="0"/>
+          <a:chOff x="0" y="0"/>
+          <a:chExt cx="0" cy="0"/>
+        </a:xfrm>
+      </p:grpSpPr>
+      <p:sp>
+        <p:nvSpPr>
+          <p:cNvPr id="4" name="テキスト ボックス 3">
+            <a:extLst>
+              <a:ext uri="{FF2B5EF4-FFF2-40B4-BE49-F238E27FC236}">
+                <a16:creationId xmlns:a16="http://schemas.microsoft.com/office/drawing/2014/main" id="{635CFCC6-B32B-F491-2C42-9AFAFFF77207}"/>
+              </a:ext>
+            </a:extLst>
+          </p:cNvPr>
+          <p:cNvSpPr txBox="1"/>
+          <p:nvPr/>
+        </p:nvSpPr>
+        <p:spPr>
+          <a:xfrm>
+            <a:off x="4196593" y="2564716"/>
+            <a:ext cx="1954634" cy="369332"/>
+          </a:xfrm>
+          <a:prstGeom prst="rect">
+            <a:avLst/>
+          </a:prstGeom>
+          <a:noFill/>
+        </p:spPr>
+        <p:txBody>
+          <a:bodyPr wrap="square" rtlCol="0">
+            <a:spAutoFit/>
+          </a:bodyPr>
+          <a:lstStyle/>
+          <a:p>
+            <a:r>
+              <a:rPr kumimoji="1" lang="en-US" altLang="ja-JP">
+                <a:solidFill>
+                  <a:schemeClr val="bg1"/>
+                </a:solidFill>
+              </a:rPr>
+              <a:t>Made with</a:t>
+            </a:r>
+            <a:endParaRPr kumimoji="1" lang="ja-JP" altLang="en-US">
+              <a:solidFill>
+                <a:schemeClr val="bg1"/>
+              </a:solidFill>
+            </a:endParaRPr>
+          </a:p>
+        </p:txBody>
+      </p:sp>
+      <p:sp>
+        <p:nvSpPr>
+          <p:cNvPr id="6" name="テキスト ボックス 5">
+            <a:extLst>
+              <a:ext uri="{FF2B5EF4-FFF2-40B4-BE49-F238E27FC236}">
+                <a16:creationId xmlns:a16="http://schemas.microsoft.com/office/drawing/2014/main" id="{EACD1271-263D-8A9D-8630-87B0677C9B24}"/>
+              </a:ext>
+            </a:extLst>
+          </p:cNvPr>
+          <p:cNvSpPr txBox="1"/>
+          <p:nvPr/>
+        </p:nvSpPr>
+        <p:spPr>
+          <a:xfrm>
+            <a:off x="4196593" y="3013501"/>
+            <a:ext cx="3798814" cy="830997"/>
+          </a:xfrm>
+          <a:prstGeom prst="rect">
+            <a:avLst/>
+          </a:prstGeom>
+          <a:noFill/>
+        </p:spPr>
+        <p:txBody>
+          <a:bodyPr wrap="square" rtlCol="0">
+            <a:spAutoFit/>
+          </a:bodyPr>
+          <a:lstStyle/>
+          <a:p>
+            <a:r>
+              <a:rPr lang="en-US" altLang="ja-JP" sz="4800" b="1">
+                <a:solidFill>
+                  <a:schemeClr val="bg1"/>
+                </a:solidFill>
+              </a:rPr>
+              <a:t>NeneEngine</a:t>
+            </a:r>
+            <a:endParaRPr kumimoji="1" lang="ja-JP" altLang="en-US" sz="4800" b="1">
+              <a:solidFill>
+                <a:schemeClr val="bg1"/>
+              </a:solidFill>
+            </a:endParaRPr>
+          </a:p>
+        </p:txBody>
+      </p:sp>
+    </p:spTree>
+    <p:extLst>
+      <p:ext uri="{BB962C8B-B14F-4D97-AF65-F5344CB8AC3E}">
+        <p14:creationId xmlns:p14="http://schemas.microsoft.com/office/powerpoint/2010/main" val="3794273172"/>
       </p:ext>
     </p:extLst>
   </p:cSld>
